--- a/dist/초3/과학/생물/초3_과학_생물_01_동물의생김새와생활_학생용.pptx
+++ b/dist/초3/과학/생물/초3_과학_생물_01_동물의생김새와생활_학생용.pptx
@@ -120,13 +120,13 @@
   <p:extLst>
     <p:ext uri="{521415D9-36F7-43E2-AB2F-B90AF26B5E84}">
       <p14:sectionLst xmlns:p14="http://schemas.microsoft.com/office/powerpoint/2010/main">
-        <p14:section name="도입" id="{0c51581f-a7d6-9106-3bfb-5830f98216f5}">
+        <p14:section name="도입" id="{7bc7d321-eb95-ac82-2de5-6ae00ce03232}">
           <p14:sldIdLst>
             <p14:sldId id="256"/>
             <p14:sldId id="257"/>
           </p14:sldIdLst>
         </p14:section>
-        <p14:section name="개념" id="{fc82b767-609f-6add-0ae1-6833cf06b8b6}">
+        <p14:section name="개념" id="{d6d8b839-aff8-eace-5561-69a4373f0a66}">
           <p14:sldIdLst>
             <p14:sldId id="258"/>
             <p14:sldId id="259"/>
@@ -136,30 +136,30 @@
             <p14:sldId id="264"/>
           </p14:sldIdLst>
         </p14:section>
-        <p14:section name="연습" id="{e4f9a4a1-0caa-8954-c7f1-e3fa1d0a39ca}">
+        <p14:section name="연습" id="{2901496e-6b84-bfad-37e6-29fa05f37631}">
           <p14:sldIdLst>
             <p14:sldId id="263"/>
             <p14:sldId id="265"/>
             <p14:sldId id="266"/>
           </p14:sldIdLst>
         </p14:section>
-        <p14:section name="개념" id="{c2e2a86b-2f78-25bd-60ca-759d6941e040}">
+        <p14:section name="개념" id="{322b0fd3-5934-0a16-7924-29c14d193d7c}">
           <p14:sldIdLst/>
         </p14:section>
-        <p14:section name="연습" id="{526c840a-5dcb-ea70-5b50-17fe52d5e1f9}">
+        <p14:section name="연습" id="{9b3c403a-ef9b-883f-4fd2-fc60acc701b9}">
           <p14:sldIdLst/>
         </p14:section>
-        <p14:section name="확인" id="{fb0df8de-5cbe-9a38-b528-ff89ed41ab90}">
+        <p14:section name="확인" id="{452e2d6f-fc8e-44b5-699e-ecc34b7f54bb}">
           <p14:sldIdLst>
             <p14:sldId id="267"/>
           </p14:sldIdLst>
         </p14:section>
-        <p14:section name="정리" id="{14b1321e-8c81-a942-e845-834a5191881a}">
+        <p14:section name="정리" id="{c3410cc0-68b9-9469-0d8e-bf10a1a6fcf9}">
           <p14:sldIdLst>
             <p14:sldId id="268"/>
           </p14:sldIdLst>
         </p14:section>
-        <p14:section name="보충" id="{b7a5946b-04e9-9ebf-6bdd-c971fb0d8432}">
+        <p14:section name="보충" id="{9bfb7dcc-cd18-e6b5-4165-3467831538a2}">
           <p14:sldIdLst>
             <p14:sldId id="269"/>
           </p14:sldIdLst>
